--- a/presentation/global_inclusion_executive_brief.pptx
+++ b/presentation/global_inclusion_executive_brief.pptx
@@ -3500,7 +3500,7 @@
                 </a:solidFill>
                 <a:latin typeface="Aptos"/>
               </a:rPr>
-              <a:t>2,753</a:t>
+              <a:t>2,841</a:t>
             </a:r>
           </a:p>
         </p:txBody>
@@ -3570,7 +3570,7 @@
                 </a:solidFill>
                 <a:latin typeface="Aptos"/>
               </a:rPr>
-              <a:t>4</a:t>
+              <a:t>6</a:t>
             </a:r>
           </a:p>
         </p:txBody>
@@ -3954,7 +3954,7 @@
                 </a:solidFill>
                 <a:latin typeface="Aptos"/>
               </a:rPr>
-              <a:t>68.2</a:t>
+              <a:t>68.3</a:t>
             </a:r>
           </a:p>
         </p:txBody>
@@ -4094,7 +4094,7 @@
                 </a:solidFill>
                 <a:latin typeface="Aptos"/>
               </a:rPr>
-              <a:t>Fairness &amp; Opportunity  60.6</a:t>
+              <a:t>Fairness &amp; Opportunity  60.8</a:t>
             </a:r>
           </a:p>
         </p:txBody>
@@ -4285,7 +4285,7 @@
                 </a:solidFill>
                 <a:latin typeface="Aptos"/>
               </a:rPr>
-              <a:t>75.1</a:t>
+              <a:t>75.2</a:t>
             </a:r>
           </a:p>
         </p:txBody>
@@ -4320,7 +4320,7 @@
                 </a:solidFill>
                 <a:latin typeface="Aptos"/>
               </a:rPr>
-              <a:t>72.9% favourable</a:t>
+              <a:t>73.0% favourable</a:t>
             </a:r>
           </a:p>
         </p:txBody>
@@ -4476,7 +4476,7 @@
                 </a:solidFill>
                 <a:latin typeface="Aptos"/>
               </a:rPr>
-              <a:t>66.3</a:t>
+              <a:t>66.0</a:t>
             </a:r>
           </a:p>
         </p:txBody>
@@ -4511,7 +4511,7 @@
                 </a:solidFill>
                 <a:latin typeface="Aptos"/>
               </a:rPr>
-              <a:t>59.2% favourable</a:t>
+              <a:t>58.7% favourable</a:t>
             </a:r>
           </a:p>
         </p:txBody>
@@ -4667,7 +4667,7 @@
                 </a:solidFill>
                 <a:latin typeface="Aptos"/>
               </a:rPr>
-              <a:t>64.3</a:t>
+              <a:t>64.8</a:t>
             </a:r>
           </a:p>
         </p:txBody>
@@ -4702,7 +4702,7 @@
                 </a:solidFill>
                 <a:latin typeface="Aptos"/>
               </a:rPr>
-              <a:t>56.0% favourable</a:t>
+              <a:t>56.8% favourable</a:t>
             </a:r>
           </a:p>
         </p:txBody>
@@ -4858,7 +4858,7 @@
                 </a:solidFill>
                 <a:latin typeface="Aptos"/>
               </a:rPr>
-              <a:t>60.6</a:t>
+              <a:t>60.8</a:t>
             </a:r>
           </a:p>
         </p:txBody>
@@ -4893,7 +4893,7 @@
                 </a:solidFill>
                 <a:latin typeface="Aptos"/>
               </a:rPr>
-              <a:t>49.8% favourable</a:t>
+              <a:t>50.1% favourable</a:t>
             </a:r>
           </a:p>
         </p:txBody>
@@ -5049,7 +5049,7 @@
                 </a:solidFill>
                 <a:latin typeface="Aptos"/>
               </a:rPr>
-              <a:t>74.8</a:t>
+              <a:t>74.5</a:t>
             </a:r>
           </a:p>
         </p:txBody>
@@ -5084,7 +5084,7 @@
                 </a:solidFill>
                 <a:latin typeface="Aptos"/>
               </a:rPr>
-              <a:t>71.7% favourable</a:t>
+              <a:t>71.0% favourable</a:t>
             </a:r>
           </a:p>
         </p:txBody>
@@ -5365,7 +5365,7 @@
                 </a:solidFill>
                 <a:latin typeface="Aptos"/>
               </a:rPr>
-              <a:t>Each bar shows the segment Inclusion Index difference versus the company-wide 68.2 baseline.</a:t>
+              <a:t>Each bar shows the segment Inclusion Index difference versus the company-wide 68.3 baseline.</a:t>
             </a:r>
           </a:p>
         </p:txBody>
@@ -5585,7 +5585,7 @@
                 </a:solidFill>
                 <a:latin typeface="Aptos"/>
               </a:rPr>
-              <a:t>6-10 years</a:t>
+              <a:t>Operations</a:t>
             </a:r>
           </a:p>
         </p:txBody>
@@ -5620,7 +5620,7 @@
                 </a:solidFill>
                 <a:latin typeface="Aptos"/>
               </a:rPr>
-              <a:t>Tenure Band</a:t>
+              <a:t>Department</a:t>
             </a:r>
           </a:p>
         </p:txBody>
@@ -5698,7 +5698,7 @@
                 </a:solidFill>
                 <a:latin typeface="Aptos"/>
               </a:rPr>
-              <a:t>-3.2</a:t>
+              <a:t>-4.4</a:t>
             </a:r>
           </a:p>
         </p:txBody>
@@ -5733,7 +5733,7 @@
                 </a:solidFill>
                 <a:latin typeface="Aptos"/>
               </a:rPr>
-              <a:t>Commercial</a:t>
+              <a:t>6-10 years</a:t>
             </a:r>
           </a:p>
         </p:txBody>
@@ -5768,7 +5768,7 @@
                 </a:solidFill>
                 <a:latin typeface="Aptos"/>
               </a:rPr>
-              <a:t>Department</a:t>
+              <a:t>Tenure Band</a:t>
             </a:r>
           </a:p>
         </p:txBody>
@@ -5846,7 +5846,7 @@
                 </a:solidFill>
                 <a:latin typeface="Aptos"/>
               </a:rPr>
-              <a:t>-3.1</a:t>
+              <a:t>-3.0</a:t>
             </a:r>
           </a:p>
         </p:txBody>
@@ -5994,7 +5994,7 @@
                 </a:solidFill>
                 <a:latin typeface="Aptos"/>
               </a:rPr>
-              <a:t>-2.4</a:t>
+              <a:t>-2.6</a:t>
             </a:r>
           </a:p>
         </p:txBody>
@@ -6029,7 +6029,7 @@
                 </a:solidFill>
                 <a:latin typeface="Aptos"/>
               </a:rPr>
-              <a:t>Operations</a:t>
+              <a:t>3-5 years</a:t>
             </a:r>
           </a:p>
         </p:txBody>
@@ -6064,7 +6064,7 @@
                 </a:solidFill>
                 <a:latin typeface="Aptos"/>
               </a:rPr>
-              <a:t>Department</a:t>
+              <a:t>Tenure Band</a:t>
             </a:r>
           </a:p>
         </p:txBody>
@@ -6142,7 +6142,7 @@
                 </a:solidFill>
                 <a:latin typeface="Aptos"/>
               </a:rPr>
-              <a:t>-2.4</a:t>
+              <a:t>-1.7</a:t>
             </a:r>
           </a:p>
         </p:txBody>
@@ -6177,7 +6177,7 @@
                 </a:solidFill>
                 <a:latin typeface="Aptos"/>
               </a:rPr>
-              <a:t>3-5 years</a:t>
+              <a:t>18-29 age band</a:t>
             </a:r>
           </a:p>
         </p:txBody>
@@ -6212,7 +6212,7 @@
                 </a:solidFill>
                 <a:latin typeface="Aptos"/>
               </a:rPr>
-              <a:t>Tenure Band</a:t>
+              <a:t>Age Band</a:t>
             </a:r>
           </a:p>
         </p:txBody>
@@ -6290,7 +6290,7 @@
                 </a:solidFill>
                 <a:latin typeface="Aptos"/>
               </a:rPr>
-              <a:t>-2.1</a:t>
+              <a:t>-1.6</a:t>
             </a:r>
           </a:p>
         </p:txBody>
@@ -6709,7 +6709,7 @@
                 </a:solidFill>
                 <a:latin typeface="Aptos"/>
               </a:rPr>
-              <a:t>03 / DRIVER ANALYSIS</a:t>
+              <a:t>03 / ASSOCIATION ANALYSIS</a:t>
             </a:r>
           </a:p>
         </p:txBody>
@@ -7050,7 +7050,7 @@
                 </a:solidFill>
                 <a:latin typeface="Aptos"/>
               </a:rPr>
-              <a:t>r = .372</a:t>
+              <a:t>r = .371</a:t>
             </a:r>
           </a:p>
         </p:txBody>
@@ -7206,7 +7206,7 @@
                 </a:solidFill>
                 <a:latin typeface="Aptos"/>
               </a:rPr>
-              <a:t>r = .356</a:t>
+              <a:t>r = .353</a:t>
             </a:r>
           </a:p>
         </p:txBody>
@@ -7362,7 +7362,7 @@
                 </a:solidFill>
                 <a:latin typeface="Aptos"/>
               </a:rPr>
-              <a:t>r = .353</a:t>
+              <a:t>r = .352</a:t>
             </a:r>
           </a:p>
         </p:txBody>
@@ -7518,7 +7518,7 @@
                 </a:solidFill>
                 <a:latin typeface="Aptos"/>
               </a:rPr>
-              <a:t>r = .297</a:t>
+              <a:t>r = .285</a:t>
             </a:r>
           </a:p>
         </p:txBody>
@@ -7674,7 +7674,7 @@
                 </a:solidFill>
                 <a:latin typeface="Aptos"/>
               </a:rPr>
-              <a:t>r = .272</a:t>
+              <a:t>r = .267</a:t>
             </a:r>
           </a:p>
         </p:txBody>
@@ -9390,6 +9390,47 @@
           </a:fontRef>
         </p:style>
       </p:cxnSp>
+      <p:sp>
+        <p:nvSpPr>
+          <p:cNvPr id="37" name="TextBox 36"/>
+          <p:cNvSpPr txBox="1"/>
+          <p:nvPr/>
+        </p:nvSpPr>
+        <p:spPr>
+          <a:xfrm>
+            <a:off x="4983480" y="6126480"/>
+            <a:ext cx="6309360" cy="384048"/>
+          </a:xfrm>
+          <a:prstGeom prst="rect">
+            <a:avLst/>
+          </a:prstGeom>
+          <a:noFill/>
+        </p:spPr>
+        <p:txBody>
+          <a:bodyPr wrap="square">
+            <a:spAutoFit/>
+          </a:bodyPr>
+          <a:lstStyle/>
+          <a:p>
+            <a:pPr algn="ctr"/>
+            <a:r>
+              <a:rPr sz="800" b="1">
+                <a:latin typeface="Aptos"/>
+              </a:rPr>
+              <a:t>Event pulse: 8 events  |  63.3% attendance  |  0.70 knowledge gain  |  4.21/5 satisfaction</a:t>
+            </a:r>
+          </a:p>
+          <a:p>
+            <a:pPr algn="ctr"/>
+            <a:r>
+              <a:rPr sz="800" b="1">
+                <a:latin typeface="Aptos"/>
+              </a:rPr>
+              <a:t>74.7% repeat intention  |  34.17 estimated cost per attendee</a:t>
+            </a:r>
+          </a:p>
+        </p:txBody>
+      </p:sp>
     </p:spTree>
   </p:cSld>
   <p:clrMapOvr>
